--- a/classes/parte-1-redes-y-seguridad-de-redes/044-zeek-para-analisis-de-red-a-gran-escala/clase-044-presentacion.pptx
+++ b/classes/parte-1-redes-y-seguridad-de-redes/044-zeek-para-analisis-de-red-a-gran-escala/clase-044-presentacion.pptx
@@ -17,6 +17,9 @@
     <p:sldId id="265" r:id="rId16"/>
     <p:sldId id="266" r:id="rId17"/>
     <p:sldId id="267" r:id="rId18"/>
+    <p:sldId id="268" r:id="rId19"/>
+    <p:sldId id="269" r:id="rId20"/>
+    <p:sldId id="270" r:id="rId21"/>
   </p:sldIdLst>
   <p:sldSz cx="9144000" cy="6858000" type="screen4x3"/>
   <p:notesSz cx="6858000" cy="9144000"/>
@@ -3198,7 +3201,7 @@
                   <a:srgbClr val="0B3D2E"/>
                 </a:solidFill>
               </a:rPr>
-              <a:t>⚠️ Errores comunes</a:t>
+              <a:t>✍️ Ejercicios</a:t>
             </a:r>
           </a:p>
         </p:txBody>
@@ -3236,67 +3239,82 @@
                   <a:srgbClr val="22282E"/>
                 </a:solidFill>
               </a:rPr>
-              <a:t>•  zeek: command not found — Zeek no está en el PATH; usa la ruta completa (/opt/zeek/bin/zeek) o ajusta el PATH</a:t>
-            </a:r>
-          </a:p>
-          <a:p>
-            <a:pPr>
-              <a:spcAft>
-                <a:spcPts val="600"/>
-              </a:spcAft>
-            </a:pPr>
-            <a:r>
-              <a:rPr sz="1500">
-                <a:solidFill>
-                  <a:srgbClr val="22282E"/>
-                </a:solidFill>
-              </a:rPr>
-              <a:t>•  zeek-cut muestra nombres de campo raros — Estás mirando el log equivocado; consulta la referencia de campos por log</a:t>
-            </a:r>
-          </a:p>
-          <a:p>
-            <a:pPr>
-              <a:spcAft>
-                <a:spcPts val="600"/>
-              </a:spcAft>
-            </a:pPr>
-            <a:r>
-              <a:rPr sz="1500">
-                <a:solidFill>
-                  <a:srgbClr val="22282E"/>
-                </a:solidFill>
-              </a:rPr>
-              <a:t>•  No se extraen archivos — No cargaste el script de extracción; añade el policy extract-all-files.zeek</a:t>
-            </a:r>
-          </a:p>
-          <a:p>
-            <a:pPr>
-              <a:spcAft>
-                <a:spcPts val="600"/>
-              </a:spcAft>
-            </a:pPr>
-            <a:r>
-              <a:rPr sz="1500">
-                <a:solidFill>
-                  <a:srgbClr val="22282E"/>
-                </a:solidFill>
-              </a:rPr>
-              <a:t>•  Script no reacciona — Falta @load del protocolo o el evento es incorrecto; revisa el nombre del evento</a:t>
-            </a:r>
-          </a:p>
-          <a:p>
-            <a:pPr>
-              <a:spcAft>
-                <a:spcPts val="600"/>
-              </a:spcAft>
-            </a:pPr>
-            <a:r>
-              <a:rPr sz="1500">
-                <a:solidFill>
-                  <a:srgbClr val="22282E"/>
-                </a:solidFill>
-              </a:rPr>
-              <a:t>•  Logs en JSON ilegibles con zeek-cut — La salida está en JSON; usa jq o cambia a formato TSV</a:t>
+              <a:t>•  Con zeek-cut, lista las 10 conexiones que más bytes transfirieron.</a:t>
+            </a:r>
+          </a:p>
+          <a:p>
+            <a:pPr>
+              <a:spcAft>
+                <a:spcPts val="600"/>
+              </a:spcAft>
+            </a:pPr>
+            <a:r>
+              <a:rPr sz="1500">
+                <a:solidFill>
+                  <a:srgbClr val="22282E"/>
+                </a:solidFill>
+              </a:rPr>
+              <a:t>•  Encuentra en ssl.log los certificados con validez sospechosa o autofirmados.</a:t>
+            </a:r>
+          </a:p>
+          <a:p>
+            <a:pPr>
+              <a:spcAft>
+                <a:spcPts val="600"/>
+              </a:spcAft>
+            </a:pPr>
+            <a:r>
+              <a:rPr sz="1500">
+                <a:solidFill>
+                  <a:srgbClr val="22282E"/>
+                </a:solidFill>
+              </a:rPr>
+              <a:t>•  Extrae de una captura un archivo transferido por HTTP y verifica su hash.</a:t>
+            </a:r>
+          </a:p>
+          <a:p>
+            <a:pPr>
+              <a:spcAft>
+                <a:spcPts val="600"/>
+              </a:spcAft>
+            </a:pPr>
+            <a:r>
+              <a:rPr sz="1500">
+                <a:solidFill>
+                  <a:srgbClr val="22282E"/>
+                </a:solidFill>
+              </a:rPr>
+              <a:t>•  Escribe un script que emita un notice cuando una conexión supere cierto volumen de datos (posible exfiltración).</a:t>
+            </a:r>
+          </a:p>
+          <a:p>
+            <a:pPr>
+              <a:spcAft>
+                <a:spcPts val="600"/>
+              </a:spcAft>
+            </a:pPr>
+            <a:r>
+              <a:rPr sz="1500">
+                <a:solidFill>
+                  <a:srgbClr val="22282E"/>
+                </a:solidFill>
+              </a:rPr>
+              <a:t>•  Correlaciona conn.log y dns.log para detectar posible beaconing (conexiones regulares a un dominio).</a:t>
+            </a:r>
+          </a:p>
+          <a:p>
+            <a:pPr>
+              <a:spcAft>
+                <a:spcPts val="600"/>
+              </a:spcAft>
+            </a:pPr>
+            <a:r>
+              <a:rPr sz="1500">
+                <a:solidFill>
+                  <a:srgbClr val="22282E"/>
+                </a:solidFill>
+              </a:rPr>
+              <a:t>•  Compara la información que aporta Zeek frente a una alerta de Suricata para el mismo tráfico.</a:t>
             </a:r>
           </a:p>
         </p:txBody>
@@ -3347,7 +3365,7 @@
                   <a:srgbClr val="0B3D2E"/>
                 </a:solidFill>
               </a:rPr>
-              <a:t>❓ Preguntas frecuentes</a:t>
+              <a:t>📝 Reto verificable</a:t>
             </a:r>
           </a:p>
         </p:txBody>
@@ -3385,97 +3403,22 @@
                   <a:srgbClr val="22282E"/>
                 </a:solidFill>
               </a:rPr>
-              <a:t>•  ❓ ¿Zeek es un IDS?</a:t>
-            </a:r>
-          </a:p>
-          <a:p>
-            <a:pPr>
-              <a:spcAft>
-                <a:spcPts val="600"/>
-              </a:spcAft>
-            </a:pPr>
-            <a:r>
-              <a:rPr sz="1500">
-                <a:solidFill>
-                  <a:srgbClr val="22282E"/>
-                </a:solidFill>
-              </a:rPr>
-              <a:t>•  No en el sentido clásico. Suricata/Snort detectan por firmas; Zeek es un motor de análisis que registra transacciones y ejecuta lógica propia. Se complementan: Suricata alerta, Zeek contextualiza.</a:t>
-            </a:r>
-          </a:p>
-          <a:p>
-            <a:pPr>
-              <a:spcAft>
-                <a:spcPts val="600"/>
-              </a:spcAft>
-            </a:pPr>
-            <a:r>
-              <a:rPr sz="1500">
-                <a:solidFill>
-                  <a:srgbClr val="22282E"/>
-                </a:solidFill>
-              </a:rPr>
-              <a:t>•  ❓ ¿Qué log uso para empezar una investigación?</a:t>
-            </a:r>
-          </a:p>
-          <a:p>
-            <a:pPr>
-              <a:spcAft>
-                <a:spcPts val="600"/>
-              </a:spcAft>
-            </a:pPr>
-            <a:r>
-              <a:rPr sz="1500">
-                <a:solidFill>
-                  <a:srgbClr val="22282E"/>
-                </a:solidFill>
-              </a:rPr>
-              <a:t>•  Casi siempre conn.log: te da todas las conexiones y sirve de índice para pivotar a los logs de aplicación (dns, http, ssl).</a:t>
-            </a:r>
-          </a:p>
-          <a:p>
-            <a:pPr>
-              <a:spcAft>
-                <a:spcPts val="600"/>
-              </a:spcAft>
-            </a:pPr>
-            <a:r>
-              <a:rPr sz="1500">
-                <a:solidFill>
-                  <a:srgbClr val="22282E"/>
-                </a:solidFill>
-              </a:rPr>
-              <a:t>•  ❓ ¿Puedo escribir mis propias detecciones?</a:t>
-            </a:r>
-          </a:p>
-          <a:p>
-            <a:pPr>
-              <a:spcAft>
-                <a:spcPts val="600"/>
-              </a:spcAft>
-            </a:pPr>
-            <a:r>
-              <a:rPr sz="1500">
-                <a:solidFill>
-                  <a:srgbClr val="22282E"/>
-                </a:solidFill>
-              </a:rPr>
-              <a:t>•  Sí, ese es el gran valor de Zeek. Su lenguaje de scripting permite reaccionar a eventos de red y emitir notices con lógica arbitraria.</a:t>
-            </a:r>
-          </a:p>
-          <a:p>
-            <a:pPr>
-              <a:spcAft>
-                <a:spcPts val="600"/>
-              </a:spcAft>
-            </a:pPr>
-            <a:r>
-              <a:rPr sz="1500">
-                <a:solidFill>
-                  <a:srgbClr val="22282E"/>
-                </a:solidFill>
-              </a:rPr>
-              <a:t>•  ❓ ¿Zeek escala a redes grandes?</a:t>
+              <a:t>•  Procesa con Zeek una captura de tu laboratorio que incluya actividad web y DNS, y entrega: (a) un resumen de las conexiones top por bytes con zeek-cut, (b) al menos un archivo extraído del tráfico…</a:t>
+            </a:r>
+          </a:p>
+          <a:p>
+            <a:pPr>
+              <a:spcAft>
+                <a:spcPts val="600"/>
+              </a:spcAft>
+            </a:pPr>
+            <a:r>
+              <a:rPr sz="1500">
+                <a:solidFill>
+                  <a:srgbClr val="22282E"/>
+                </a:solidFill>
+              </a:rPr>
+              <a:t>•  Criterio de aceptación: los logs se generan correctamente, el archivo extraído coincide (hash) con el transferido, y tu script produce el notice esperado al procesar la captura, sin falsos positivos…</a:t>
             </a:r>
           </a:p>
         </p:txBody>
@@ -3526,7 +3469,7 @@
                   <a:srgbClr val="0B3D2E"/>
                 </a:solidFill>
               </a:rPr>
-              <a:t>🔗 Referencias</a:t>
+              <a:t>⚠️ Errores comunes</a:t>
             </a:r>
           </a:p>
         </p:txBody>
@@ -3564,6 +3507,334 @@
                   <a:srgbClr val="22282E"/>
                 </a:solidFill>
               </a:rPr>
+              <a:t>•  zeek: command not found — Zeek no está en el PATH; usa la ruta completa (/opt/zeek/bin/zeek) o ajusta el PATH</a:t>
+            </a:r>
+          </a:p>
+          <a:p>
+            <a:pPr>
+              <a:spcAft>
+                <a:spcPts val="600"/>
+              </a:spcAft>
+            </a:pPr>
+            <a:r>
+              <a:rPr sz="1500">
+                <a:solidFill>
+                  <a:srgbClr val="22282E"/>
+                </a:solidFill>
+              </a:rPr>
+              <a:t>•  zeek-cut muestra nombres de campo raros — Estás mirando el log equivocado; consulta la referencia de campos por log</a:t>
+            </a:r>
+          </a:p>
+          <a:p>
+            <a:pPr>
+              <a:spcAft>
+                <a:spcPts val="600"/>
+              </a:spcAft>
+            </a:pPr>
+            <a:r>
+              <a:rPr sz="1500">
+                <a:solidFill>
+                  <a:srgbClr val="22282E"/>
+                </a:solidFill>
+              </a:rPr>
+              <a:t>•  No se extraen archivos — No cargaste el script de extracción; añade el policy extract-all-files.zeek</a:t>
+            </a:r>
+          </a:p>
+          <a:p>
+            <a:pPr>
+              <a:spcAft>
+                <a:spcPts val="600"/>
+              </a:spcAft>
+            </a:pPr>
+            <a:r>
+              <a:rPr sz="1500">
+                <a:solidFill>
+                  <a:srgbClr val="22282E"/>
+                </a:solidFill>
+              </a:rPr>
+              <a:t>•  Script no reacciona — Falta @load del protocolo o el evento es incorrecto; revisa el nombre del evento</a:t>
+            </a:r>
+          </a:p>
+          <a:p>
+            <a:pPr>
+              <a:spcAft>
+                <a:spcPts val="600"/>
+              </a:spcAft>
+            </a:pPr>
+            <a:r>
+              <a:rPr sz="1500">
+                <a:solidFill>
+                  <a:srgbClr val="22282E"/>
+                </a:solidFill>
+              </a:rPr>
+              <a:t>•  Logs en JSON ilegibles con zeek-cut — La salida está en JSON; usa jq o cambia a formato TSV</a:t>
+            </a:r>
+          </a:p>
+        </p:txBody>
+      </p:sp>
+    </p:spTree>
+  </p:cSld>
+  <p:clrMapOvr>
+    <a:masterClrMapping/>
+  </p:clrMapOvr>
+</p:sld>
+</file>
+
+<file path=ppt/slides/slide13.xml><?xml version="1.0" encoding="utf-8"?>
+<p:sld xmlns:a="http://schemas.openxmlformats.org/drawingml/2006/main" xmlns:p="http://schemas.openxmlformats.org/presentationml/2006/main" xmlns:r="http://schemas.openxmlformats.org/officeDocument/2006/relationships">
+  <p:cSld>
+    <p:spTree>
+      <p:nvGrpSpPr>
+        <p:cNvPr id="1" name=""/>
+        <p:cNvGrpSpPr/>
+        <p:nvPr/>
+      </p:nvGrpSpPr>
+      <p:grpSpPr/>
+      <p:sp>
+        <p:nvSpPr>
+          <p:cNvPr id="2" name="TextBox 1"/>
+          <p:cNvSpPr txBox="1"/>
+          <p:nvPr/>
+        </p:nvSpPr>
+        <p:spPr>
+          <a:xfrm>
+            <a:off x="457200" y="320040"/>
+            <a:ext cx="8229600" cy="822960"/>
+          </a:xfrm>
+          <a:prstGeom prst="rect">
+            <a:avLst/>
+          </a:prstGeom>
+          <a:noFill/>
+        </p:spPr>
+        <p:txBody>
+          <a:bodyPr wrap="square">
+            <a:spAutoFit/>
+          </a:bodyPr>
+          <a:lstStyle/>
+          <a:p>
+            <a:r>
+              <a:rPr sz="2600" b="1">
+                <a:solidFill>
+                  <a:srgbClr val="0B3D2E"/>
+                </a:solidFill>
+              </a:rPr>
+              <a:t>❓ Preguntas frecuentes</a:t>
+            </a:r>
+          </a:p>
+        </p:txBody>
+      </p:sp>
+      <p:sp>
+        <p:nvSpPr>
+          <p:cNvPr id="3" name="TextBox 2"/>
+          <p:cNvSpPr txBox="1"/>
+          <p:nvPr/>
+        </p:nvSpPr>
+        <p:spPr>
+          <a:xfrm>
+            <a:off x="457200" y="1280160"/>
+            <a:ext cx="8229600" cy="4937760"/>
+          </a:xfrm>
+          <a:prstGeom prst="rect">
+            <a:avLst/>
+          </a:prstGeom>
+          <a:noFill/>
+        </p:spPr>
+        <p:txBody>
+          <a:bodyPr wrap="square">
+            <a:spAutoFit/>
+          </a:bodyPr>
+          <a:lstStyle/>
+          <a:p>
+            <a:pPr>
+              <a:spcAft>
+                <a:spcPts val="600"/>
+              </a:spcAft>
+            </a:pPr>
+            <a:r>
+              <a:rPr sz="1500">
+                <a:solidFill>
+                  <a:srgbClr val="22282E"/>
+                </a:solidFill>
+              </a:rPr>
+              <a:t>•  ❓ ¿Zeek es un IDS?</a:t>
+            </a:r>
+          </a:p>
+          <a:p>
+            <a:pPr>
+              <a:spcAft>
+                <a:spcPts val="600"/>
+              </a:spcAft>
+            </a:pPr>
+            <a:r>
+              <a:rPr sz="1500">
+                <a:solidFill>
+                  <a:srgbClr val="22282E"/>
+                </a:solidFill>
+              </a:rPr>
+              <a:t>•  No en el sentido clásico. Suricata/Snort detectan por firmas; Zeek es un motor de análisis que registra transacciones y ejecuta lógica propia. Se complementan: Suricata alerta, Zeek contextualiza.</a:t>
+            </a:r>
+          </a:p>
+          <a:p>
+            <a:pPr>
+              <a:spcAft>
+                <a:spcPts val="600"/>
+              </a:spcAft>
+            </a:pPr>
+            <a:r>
+              <a:rPr sz="1500">
+                <a:solidFill>
+                  <a:srgbClr val="22282E"/>
+                </a:solidFill>
+              </a:rPr>
+              <a:t>•  ❓ ¿Qué log uso para empezar una investigación?</a:t>
+            </a:r>
+          </a:p>
+          <a:p>
+            <a:pPr>
+              <a:spcAft>
+                <a:spcPts val="600"/>
+              </a:spcAft>
+            </a:pPr>
+            <a:r>
+              <a:rPr sz="1500">
+                <a:solidFill>
+                  <a:srgbClr val="22282E"/>
+                </a:solidFill>
+              </a:rPr>
+              <a:t>•  Casi siempre conn.log: te da todas las conexiones y sirve de índice para pivotar a los logs de aplicación (dns, http, ssl).</a:t>
+            </a:r>
+          </a:p>
+          <a:p>
+            <a:pPr>
+              <a:spcAft>
+                <a:spcPts val="600"/>
+              </a:spcAft>
+            </a:pPr>
+            <a:r>
+              <a:rPr sz="1500">
+                <a:solidFill>
+                  <a:srgbClr val="22282E"/>
+                </a:solidFill>
+              </a:rPr>
+              <a:t>•  ❓ ¿Puedo escribir mis propias detecciones?</a:t>
+            </a:r>
+          </a:p>
+          <a:p>
+            <a:pPr>
+              <a:spcAft>
+                <a:spcPts val="600"/>
+              </a:spcAft>
+            </a:pPr>
+            <a:r>
+              <a:rPr sz="1500">
+                <a:solidFill>
+                  <a:srgbClr val="22282E"/>
+                </a:solidFill>
+              </a:rPr>
+              <a:t>•  Sí, ese es el gran valor de Zeek. Su lenguaje de scripting permite reaccionar a eventos de red y emitir notices con lógica arbitraria.</a:t>
+            </a:r>
+          </a:p>
+          <a:p>
+            <a:pPr>
+              <a:spcAft>
+                <a:spcPts val="600"/>
+              </a:spcAft>
+            </a:pPr>
+            <a:r>
+              <a:rPr sz="1500">
+                <a:solidFill>
+                  <a:srgbClr val="22282E"/>
+                </a:solidFill>
+              </a:rPr>
+              <a:t>•  ❓ ¿Zeek escala a redes grandes?</a:t>
+            </a:r>
+          </a:p>
+        </p:txBody>
+      </p:sp>
+    </p:spTree>
+  </p:cSld>
+  <p:clrMapOvr>
+    <a:masterClrMapping/>
+  </p:clrMapOvr>
+</p:sld>
+</file>
+
+<file path=ppt/slides/slide14.xml><?xml version="1.0" encoding="utf-8"?>
+<p:sld xmlns:a="http://schemas.openxmlformats.org/drawingml/2006/main" xmlns:p="http://schemas.openxmlformats.org/presentationml/2006/main" xmlns:r="http://schemas.openxmlformats.org/officeDocument/2006/relationships">
+  <p:cSld>
+    <p:spTree>
+      <p:nvGrpSpPr>
+        <p:cNvPr id="1" name=""/>
+        <p:cNvGrpSpPr/>
+        <p:nvPr/>
+      </p:nvGrpSpPr>
+      <p:grpSpPr/>
+      <p:sp>
+        <p:nvSpPr>
+          <p:cNvPr id="2" name="TextBox 1"/>
+          <p:cNvSpPr txBox="1"/>
+          <p:nvPr/>
+        </p:nvSpPr>
+        <p:spPr>
+          <a:xfrm>
+            <a:off x="457200" y="320040"/>
+            <a:ext cx="8229600" cy="822960"/>
+          </a:xfrm>
+          <a:prstGeom prst="rect">
+            <a:avLst/>
+          </a:prstGeom>
+          <a:noFill/>
+        </p:spPr>
+        <p:txBody>
+          <a:bodyPr wrap="square">
+            <a:spAutoFit/>
+          </a:bodyPr>
+          <a:lstStyle/>
+          <a:p>
+            <a:r>
+              <a:rPr sz="2600" b="1">
+                <a:solidFill>
+                  <a:srgbClr val="0B3D2E"/>
+                </a:solidFill>
+              </a:rPr>
+              <a:t>🔗 Referencias</a:t>
+            </a:r>
+          </a:p>
+        </p:txBody>
+      </p:sp>
+      <p:sp>
+        <p:nvSpPr>
+          <p:cNvPr id="3" name="TextBox 2"/>
+          <p:cNvSpPr txBox="1"/>
+          <p:nvPr/>
+        </p:nvSpPr>
+        <p:spPr>
+          <a:xfrm>
+            <a:off x="457200" y="1280160"/>
+            <a:ext cx="8229600" cy="4937760"/>
+          </a:xfrm>
+          <a:prstGeom prst="rect">
+            <a:avLst/>
+          </a:prstGeom>
+          <a:noFill/>
+        </p:spPr>
+        <p:txBody>
+          <a:bodyPr wrap="square">
+            <a:spAutoFit/>
+          </a:bodyPr>
+          <a:lstStyle/>
+          <a:p>
+            <a:pPr>
+              <a:spcAft>
+                <a:spcPts val="600"/>
+              </a:spcAft>
+            </a:pPr>
+            <a:r>
+              <a:rPr sz="1500">
+                <a:solidFill>
+                  <a:srgbClr val="22282E"/>
+                </a:solidFill>
+              </a:rPr>
               <a:t>•  Zeek Documentation. &lt;https://docs.zeek.org/&gt;</a:t>
             </a:r>
           </a:p>
@@ -3614,6 +3885,81 @@
           </a:p>
         </p:txBody>
       </p:sp>
+    </p:spTree>
+  </p:cSld>
+  <p:clrMapOvr>
+    <a:masterClrMapping/>
+  </p:clrMapOvr>
+</p:sld>
+</file>
+
+<file path=ppt/slides/slide15.xml><?xml version="1.0" encoding="utf-8"?>
+<p:sld xmlns:a="http://schemas.openxmlformats.org/drawingml/2006/main" xmlns:p="http://schemas.openxmlformats.org/presentationml/2006/main" xmlns:r="http://schemas.openxmlformats.org/officeDocument/2006/relationships">
+  <p:cSld>
+    <p:spTree>
+      <p:nvGrpSpPr>
+        <p:cNvPr id="1" name=""/>
+        <p:cNvGrpSpPr/>
+        <p:nvPr/>
+      </p:nvGrpSpPr>
+      <p:grpSpPr/>
+      <p:sp>
+        <p:nvSpPr>
+          <p:cNvPr id="2" name="TextBox 1"/>
+          <p:cNvSpPr txBox="1"/>
+          <p:nvPr/>
+        </p:nvSpPr>
+        <p:spPr>
+          <a:xfrm>
+            <a:off x="457200" y="274320"/>
+            <a:ext cx="8229600" cy="640080"/>
+          </a:xfrm>
+          <a:prstGeom prst="rect">
+            <a:avLst/>
+          </a:prstGeom>
+          <a:noFill/>
+        </p:spPr>
+        <p:txBody>
+          <a:bodyPr wrap="square">
+            <a:spAutoFit/>
+          </a:bodyPr>
+          <a:lstStyle/>
+          <a:p>
+            <a:r>
+              <a:rPr sz="2200" b="1">
+                <a:solidFill>
+                  <a:srgbClr val="0B3D2E"/>
+                </a:solidFill>
+              </a:rPr>
+              <a:t>Diagrama de la clase</a:t>
+            </a:r>
+          </a:p>
+        </p:txBody>
+      </p:sp>
+      <p:pic>
+        <p:nvPicPr>
+          <p:cNvPr id="3" name="Picture 2" descr="d5fde21d8a650f24.png"/>
+          <p:cNvPicPr>
+            <a:picLocks noChangeAspect="1"/>
+          </p:cNvPicPr>
+          <p:nvPr/>
+        </p:nvPicPr>
+        <p:blipFill>
+          <a:blip r:embed="rId2"/>
+          <a:stretch>
+            <a:fillRect/>
+          </a:stretch>
+        </p:blipFill>
+        <p:spPr>
+          <a:xfrm>
+            <a:off x="457200" y="2980944"/>
+            <a:ext cx="8229600" cy="1536192"/>
+          </a:xfrm>
+          <a:prstGeom prst="rect">
+            <a:avLst/>
+          </a:prstGeom>
+        </p:spPr>
+      </p:pic>
     </p:spTree>
   </p:cSld>
   <p:clrMapOvr>
@@ -3698,7 +4044,7 @@
                   <a:srgbClr val="22282E"/>
                 </a:solidFill>
               </a:rPr>
-              <a:t>•  Dominar Zeek (antes Bro), el motor de análisis de red que convierte el tráfico en logs de transacción ricos y permite escribir lógica de detección personalizada. El alumno aprenderá a procesar pcaps y tráfico en vivo, a leer los logs de Zeek, a extraer artefactos y a escribir scripts de detección en el lenguaje de Zeek.</a:t>
+              <a:t>•  Dominar Zeek (antes Bro), el motor de análisis de red que convierte el tráfico en logs de transacción ricos y permite escribir lógica de detección personalizada. El alumno aprenderá a procesar pcaps…</a:t>
             </a:r>
           </a:p>
         </p:txBody>
@@ -4107,7 +4453,7 @@
                   <a:srgbClr val="0B3D2E"/>
                 </a:solidFill>
               </a:rPr>
-              <a:t>📖 Definiciones y características</a:t>
+              <a:t>🧠 Explicación en profundidad</a:t>
             </a:r>
           </a:p>
         </p:txBody>
@@ -4145,82 +4491,97 @@
                   <a:srgbClr val="22282E"/>
                 </a:solidFill>
               </a:rPr>
-              <a:t>•  Zeek: framework de análisis de red orientado a eventos; no es un IDS de firmas, sino un motor que registra la actividad y ejecuta scripts ante eventos de protocolo.</a:t>
-            </a:r>
-          </a:p>
-          <a:p>
-            <a:pPr>
-              <a:spcAft>
-                <a:spcPts val="600"/>
-              </a:spcAft>
-            </a:pPr>
-            <a:r>
-              <a:rPr sz="1500">
-                <a:solidFill>
-                  <a:srgbClr val="22282E"/>
-                </a:solidFill>
-              </a:rPr>
-              <a:t>•  conn.log: registro de cada conexión (5-tupla, duración, bytes, estado); el log más usado para investigación.</a:t>
-            </a:r>
-          </a:p>
-          <a:p>
-            <a:pPr>
-              <a:spcAft>
-                <a:spcPts val="600"/>
-              </a:spcAft>
-            </a:pPr>
-            <a:r>
-              <a:rPr sz="1500">
-                <a:solidFill>
-                  <a:srgbClr val="22282E"/>
-                </a:solidFill>
-              </a:rPr>
-              <a:t>•  Log de transacción: dns.log, http.log, ssl.log, files.log, etc.; describen la actividad a nivel de aplicación.</a:t>
-            </a:r>
-          </a:p>
-          <a:p>
-            <a:pPr>
-              <a:spcAft>
-                <a:spcPts val="600"/>
-              </a:spcAft>
-            </a:pPr>
-            <a:r>
-              <a:rPr sz="1500">
-                <a:solidFill>
-                  <a:srgbClr val="22282E"/>
-                </a:solidFill>
-              </a:rPr>
-              <a:t>•  zeek-cut: utilidad para extraer columnas específicas de los logs (con cabeceras) desde la línea de comandos.</a:t>
-            </a:r>
-          </a:p>
-          <a:p>
-            <a:pPr>
-              <a:spcAft>
-                <a:spcPts val="600"/>
-              </a:spcAft>
-            </a:pPr>
-            <a:r>
-              <a:rPr sz="1500">
-                <a:solidFill>
-                  <a:srgbClr val="22282E"/>
-                </a:solidFill>
-              </a:rPr>
-              <a:t>•  notice: mecanismo de Zeek para emitir alertas cuando un script detecta algo relevante.</a:t>
-            </a:r>
-          </a:p>
-          <a:p>
-            <a:pPr>
-              <a:spcAft>
-                <a:spcPts val="600"/>
-              </a:spcAft>
-            </a:pPr>
-            <a:r>
-              <a:rPr sz="1500">
-                <a:solidFill>
-                  <a:srgbClr val="22282E"/>
-                </a:solidFill>
-              </a:rPr>
-              <a:t>•  Evento: en Zeek, un hecho de red (p. ej. httprequest) al que un script puede reaccionar con lógica propia.</a:t>
+              <a:t>•  La diferencia esencial entre Zeek y un IDS de firmas como Suricata es de propósito.</a:t>
+            </a:r>
+          </a:p>
+          <a:p>
+            <a:pPr>
+              <a:spcAft>
+                <a:spcPts val="600"/>
+              </a:spcAft>
+            </a:pPr>
+            <a:r>
+              <a:rPr sz="1500">
+                <a:solidFill>
+                  <a:srgbClr val="22282E"/>
+                </a:solidFill>
+              </a:rPr>
+              <a:t>•  Suricata pregunta "¿este tráfico coincide con algo malo conocido?". Zeek pregunta "¿qué</a:t>
+            </a:r>
+          </a:p>
+          <a:p>
+            <a:pPr>
+              <a:spcAft>
+                <a:spcPts val="600"/>
+              </a:spcAft>
+            </a:pPr>
+            <a:r>
+              <a:rPr sz="1500">
+                <a:solidFill>
+                  <a:srgbClr val="22282E"/>
+                </a:solidFill>
+              </a:rPr>
+              <a:t>•  está ocurriendo en esta red?" y lo escribe en registros estructurados, dejando el juicio</a:t>
+            </a:r>
+          </a:p>
+          <a:p>
+            <a:pPr>
+              <a:spcAft>
+                <a:spcPts val="600"/>
+              </a:spcAft>
+            </a:pPr>
+            <a:r>
+              <a:rPr sz="1500">
+                <a:solidFill>
+                  <a:srgbClr val="22282E"/>
+                </a:solidFill>
+              </a:rPr>
+              <a:t>•  para después. Por eso Zeek es la fuente de los datos de transacción de NSM: no genera</a:t>
+            </a:r>
+          </a:p>
+          <a:p>
+            <a:pPr>
+              <a:spcAft>
+                <a:spcPts val="600"/>
+              </a:spcAft>
+            </a:pPr>
+            <a:r>
+              <a:rPr sz="1500">
+                <a:solidFill>
+                  <a:srgbClr val="22282E"/>
+                </a:solidFill>
+              </a:rPr>
+              <a:t>•  sobre todo alertas, genera un diario de la actividad de la red del que luego se puede</a:t>
+            </a:r>
+          </a:p>
+          <a:p>
+            <a:pPr>
+              <a:spcAft>
+                <a:spcPts val="600"/>
+              </a:spcAft>
+            </a:pPr>
+            <a:r>
+              <a:rPr sz="1500">
+                <a:solidFill>
+                  <a:srgbClr val="22282E"/>
+                </a:solidFill>
+              </a:rPr>
+              <a:t>•  extraer casi cualquier cosa —incluida evidencia de ataques que aún no tenían firma cuando</a:t>
+            </a:r>
+          </a:p>
+          <a:p>
+            <a:pPr>
+              <a:spcAft>
+                <a:spcPts val="600"/>
+              </a:spcAft>
+            </a:pPr>
+            <a:r>
+              <a:rPr sz="1500">
+                <a:solidFill>
+                  <a:srgbClr val="22282E"/>
+                </a:solidFill>
+              </a:rPr>
+              <a:t>•  ocurrieron—.</a:t>
             </a:r>
           </a:p>
         </p:txBody>
@@ -4271,7 +4632,7 @@
                   <a:srgbClr val="0B3D2E"/>
                 </a:solidFill>
               </a:rPr>
-              <a:t>🧰 Herramientas y preparación</a:t>
+              <a:t>📖 Definiciones y características</a:t>
             </a:r>
           </a:p>
         </p:txBody>
@@ -4309,37 +4670,82 @@
                   <a:srgbClr val="22282E"/>
                 </a:solidFill>
               </a:rPr>
-              <a:t>•  Zeek 6.x: instalación desde paquetes oficiales o apt install zeek (repos de OpenSUSE OBS) / compilación.</a:t>
-            </a:r>
-          </a:p>
-          <a:p>
-            <a:pPr>
-              <a:spcAft>
-                <a:spcPts val="600"/>
-              </a:spcAft>
-            </a:pPr>
-            <a:r>
-              <a:rPr sz="1500">
-                <a:solidFill>
-                  <a:srgbClr val="22282E"/>
-                </a:solidFill>
-              </a:rPr>
-              <a:t>•  zeek-cut viene con Zeek; jq si usas la salida JSON.</a:t>
-            </a:r>
-          </a:p>
-          <a:p>
-            <a:pPr>
-              <a:spcAft>
-                <a:spcPts val="600"/>
-              </a:spcAft>
-            </a:pPr>
-            <a:r>
-              <a:rPr sz="1500">
-                <a:solidFill>
-                  <a:srgbClr val="22282E"/>
-                </a:solidFill>
-              </a:rPr>
-              <a:t>•  Un pcap de laboratorio con varios protocolos (reutiliza los de clases anteriores).</a:t>
+              <a:t>•  Zeek: framework de análisis de red orientado a eventos; no es un IDS de firmas, sino un motor que registra la actividad y ejecuta scripts ante eventos de protocolo.</a:t>
+            </a:r>
+          </a:p>
+          <a:p>
+            <a:pPr>
+              <a:spcAft>
+                <a:spcPts val="600"/>
+              </a:spcAft>
+            </a:pPr>
+            <a:r>
+              <a:rPr sz="1500">
+                <a:solidFill>
+                  <a:srgbClr val="22282E"/>
+                </a:solidFill>
+              </a:rPr>
+              <a:t>•  conn.log: registro de cada conexión (5-tupla, duración, bytes, estado); el log más usado para investigación.</a:t>
+            </a:r>
+          </a:p>
+          <a:p>
+            <a:pPr>
+              <a:spcAft>
+                <a:spcPts val="600"/>
+              </a:spcAft>
+            </a:pPr>
+            <a:r>
+              <a:rPr sz="1500">
+                <a:solidFill>
+                  <a:srgbClr val="22282E"/>
+                </a:solidFill>
+              </a:rPr>
+              <a:t>•  Log de transacción: dns.log, http.log, ssl.log, files.log, etc.; describen la actividad a nivel de aplicación.</a:t>
+            </a:r>
+          </a:p>
+          <a:p>
+            <a:pPr>
+              <a:spcAft>
+                <a:spcPts val="600"/>
+              </a:spcAft>
+            </a:pPr>
+            <a:r>
+              <a:rPr sz="1500">
+                <a:solidFill>
+                  <a:srgbClr val="22282E"/>
+                </a:solidFill>
+              </a:rPr>
+              <a:t>•  zeek-cut: utilidad para extraer columnas específicas de los logs (con cabeceras) desde la línea de comandos.</a:t>
+            </a:r>
+          </a:p>
+          <a:p>
+            <a:pPr>
+              <a:spcAft>
+                <a:spcPts val="600"/>
+              </a:spcAft>
+            </a:pPr>
+            <a:r>
+              <a:rPr sz="1500">
+                <a:solidFill>
+                  <a:srgbClr val="22282E"/>
+                </a:solidFill>
+              </a:rPr>
+              <a:t>•  notice: mecanismo de Zeek para emitir alertas cuando un script detecta algo relevante.</a:t>
+            </a:r>
+          </a:p>
+          <a:p>
+            <a:pPr>
+              <a:spcAft>
+                <a:spcPts val="600"/>
+              </a:spcAft>
+            </a:pPr>
+            <a:r>
+              <a:rPr sz="1500">
+                <a:solidFill>
+                  <a:srgbClr val="22282E"/>
+                </a:solidFill>
+              </a:rPr>
+              <a:t>•  Evento: en Zeek, un hecho de red (p. ej. httprequest) al que un script puede reaccionar con lógica propia.</a:t>
             </a:r>
           </a:p>
         </p:txBody>
@@ -4390,7 +4796,7 @@
                   <a:srgbClr val="0B3D2E"/>
                 </a:solidFill>
               </a:rPr>
-              <a:t>🧪 Laboratorio guiado</a:t>
+              <a:t>📔 Glosario</a:t>
             </a:r>
           </a:p>
         </p:txBody>
@@ -4428,97 +4834,97 @@
                   <a:srgbClr val="22282E"/>
                 </a:solidFill>
               </a:rPr>
-              <a:t>•  Procesa un pcap y genera los logs:</a:t>
-            </a:r>
-          </a:p>
-          <a:p>
-            <a:pPr>
-              <a:spcAft>
-                <a:spcPts val="600"/>
-              </a:spcAft>
-            </a:pPr>
-            <a:r>
-              <a:rPr sz="1500">
-                <a:solidFill>
-                  <a:srgbClr val="22282E"/>
-                </a:solidFill>
-              </a:rPr>
-              <a:t>•  mkdir zeek-out &amp;&amp; cd zeek-out</a:t>
-            </a:r>
-          </a:p>
-          <a:p>
-            <a:pPr>
-              <a:spcAft>
-                <a:spcPts val="600"/>
-              </a:spcAft>
-            </a:pPr>
-            <a:r>
-              <a:rPr sz="1500">
-                <a:solidFill>
-                  <a:srgbClr val="22282E"/>
-                </a:solidFill>
-              </a:rPr>
-              <a:t>•  zeek -r /tmp/lab027.pcapng</a:t>
-            </a:r>
-          </a:p>
-          <a:p>
-            <a:pPr>
-              <a:spcAft>
-                <a:spcPts val="600"/>
-              </a:spcAft>
-            </a:pPr>
-            <a:r>
-              <a:rPr sz="1500">
-                <a:solidFill>
-                  <a:srgbClr val="22282E"/>
-                </a:solidFill>
-              </a:rPr>
-              <a:t>•  ls    # conn.log dns.log http.log ssl.log files.log ...</a:t>
-            </a:r>
-          </a:p>
-          <a:p>
-            <a:pPr>
-              <a:spcAft>
-                <a:spcPts val="600"/>
-              </a:spcAft>
-            </a:pPr>
-            <a:r>
-              <a:rPr sz="1500">
-                <a:solidFill>
-                  <a:srgbClr val="22282E"/>
-                </a:solidFill>
-              </a:rPr>
-              <a:t>•  Inspecciona conexiones con zeek-cut:</a:t>
-            </a:r>
-          </a:p>
-          <a:p>
-            <a:pPr>
-              <a:spcAft>
-                <a:spcPts val="600"/>
-              </a:spcAft>
-            </a:pPr>
-            <a:r>
-              <a:rPr sz="1500">
-                <a:solidFill>
-                  <a:srgbClr val="22282E"/>
-                </a:solidFill>
-              </a:rPr>
-              <a:t>•  cat conn.log | zeek-cut id.origh id.resph id.respp proto service duration origbytes respbytes</a:t>
-            </a:r>
-          </a:p>
-          <a:p>
-            <a:pPr>
-              <a:spcAft>
-                <a:spcPts val="600"/>
-              </a:spcAft>
-            </a:pPr>
-            <a:r>
-              <a:rPr sz="1500">
-                <a:solidFill>
-                  <a:srgbClr val="22282E"/>
-                </a:solidFill>
-              </a:rPr>
-              <a:t>•  Analiza DNS:</a:t>
+              <a:t>•  Término — Definición concisa</a:t>
+            </a:r>
+          </a:p>
+          <a:p>
+            <a:pPr>
+              <a:spcAft>
+                <a:spcPts val="600"/>
+              </a:spcAft>
+            </a:pPr>
+            <a:r>
+              <a:rPr sz="1500">
+                <a:solidFill>
+                  <a:srgbClr val="22282E"/>
+                </a:solidFill>
+              </a:rPr>
+              <a:t>•  Zeek — Motor de análisis de red que genera logs de transacción, no firmas</a:t>
+            </a:r>
+          </a:p>
+          <a:p>
+            <a:pPr>
+              <a:spcAft>
+                <a:spcPts val="600"/>
+              </a:spcAft>
+            </a:pPr>
+            <a:r>
+              <a:rPr sz="1500">
+                <a:solidFill>
+                  <a:srgbClr val="22282E"/>
+                </a:solidFill>
+              </a:rPr>
+              <a:t>•  Dirigido por eventos — Arquitectura en que cada actividad dispara un evento programable</a:t>
+            </a:r>
+          </a:p>
+          <a:p>
+            <a:pPr>
+              <a:spcAft>
+                <a:spcPts val="600"/>
+              </a:spcAft>
+            </a:pPr>
+            <a:r>
+              <a:rPr sz="1500">
+                <a:solidFill>
+                  <a:srgbClr val="22282E"/>
+                </a:solidFill>
+              </a:rPr>
+              <a:t>•  Evento — Señal que emite el motor (conexión, petición HTTP, handshake TLS…)</a:t>
+            </a:r>
+          </a:p>
+          <a:p>
+            <a:pPr>
+              <a:spcAft>
+                <a:spcPts val="600"/>
+              </a:spcAft>
+            </a:pPr>
+            <a:r>
+              <a:rPr sz="1500">
+                <a:solidFill>
+                  <a:srgbClr val="22282E"/>
+                </a:solidFill>
+              </a:rPr>
+              <a:t>•  Script de Zeek — Código que reacciona a eventos para generar logs o detección</a:t>
+            </a:r>
+          </a:p>
+          <a:p>
+            <a:pPr>
+              <a:spcAft>
+                <a:spcPts val="600"/>
+              </a:spcAft>
+            </a:pPr>
+            <a:r>
+              <a:rPr sz="1500">
+                <a:solidFill>
+                  <a:srgbClr val="22282E"/>
+                </a:solidFill>
+              </a:rPr>
+              <a:t>•  conn.log — Registro maestro: una línea por conexión con su 5-tupla y bytes</a:t>
+            </a:r>
+          </a:p>
+          <a:p>
+            <a:pPr>
+              <a:spcAft>
+                <a:spcPts val="600"/>
+              </a:spcAft>
+            </a:pPr>
+            <a:r>
+              <a:rPr sz="1500">
+                <a:solidFill>
+                  <a:srgbClr val="22282E"/>
+                </a:solidFill>
+              </a:rPr>
+              <a:t>•  http.log / dns.log / ssl.log — Logs detallados por protocolo</a:t>
             </a:r>
           </a:p>
         </p:txBody>
@@ -4569,7 +4975,7 @@
                   <a:srgbClr val="0B3D2E"/>
                 </a:solidFill>
               </a:rPr>
-              <a:t>✍️ Ejercicios</a:t>
+              <a:t>🧰 Herramientas y preparación</a:t>
             </a:r>
           </a:p>
         </p:txBody>
@@ -4607,82 +5013,37 @@
                   <a:srgbClr val="22282E"/>
                 </a:solidFill>
               </a:rPr>
-              <a:t>•  Con zeek-cut, lista las 10 conexiones que más bytes transfirieron.</a:t>
-            </a:r>
-          </a:p>
-          <a:p>
-            <a:pPr>
-              <a:spcAft>
-                <a:spcPts val="600"/>
-              </a:spcAft>
-            </a:pPr>
-            <a:r>
-              <a:rPr sz="1500">
-                <a:solidFill>
-                  <a:srgbClr val="22282E"/>
-                </a:solidFill>
-              </a:rPr>
-              <a:t>•  Encuentra en ssl.log los certificados con validez sospechosa o autofirmados.</a:t>
-            </a:r>
-          </a:p>
-          <a:p>
-            <a:pPr>
-              <a:spcAft>
-                <a:spcPts val="600"/>
-              </a:spcAft>
-            </a:pPr>
-            <a:r>
-              <a:rPr sz="1500">
-                <a:solidFill>
-                  <a:srgbClr val="22282E"/>
-                </a:solidFill>
-              </a:rPr>
-              <a:t>•  Extrae de una captura un archivo transferido por HTTP y verifica su hash.</a:t>
-            </a:r>
-          </a:p>
-          <a:p>
-            <a:pPr>
-              <a:spcAft>
-                <a:spcPts val="600"/>
-              </a:spcAft>
-            </a:pPr>
-            <a:r>
-              <a:rPr sz="1500">
-                <a:solidFill>
-                  <a:srgbClr val="22282E"/>
-                </a:solidFill>
-              </a:rPr>
-              <a:t>•  Escribe un script que emita un notice cuando una conexión supere cierto volumen de datos (posible exfiltración).</a:t>
-            </a:r>
-          </a:p>
-          <a:p>
-            <a:pPr>
-              <a:spcAft>
-                <a:spcPts val="600"/>
-              </a:spcAft>
-            </a:pPr>
-            <a:r>
-              <a:rPr sz="1500">
-                <a:solidFill>
-                  <a:srgbClr val="22282E"/>
-                </a:solidFill>
-              </a:rPr>
-              <a:t>•  Correlaciona conn.log y dns.log para detectar posible beaconing (conexiones regulares a un dominio).</a:t>
-            </a:r>
-          </a:p>
-          <a:p>
-            <a:pPr>
-              <a:spcAft>
-                <a:spcPts val="600"/>
-              </a:spcAft>
-            </a:pPr>
-            <a:r>
-              <a:rPr sz="1500">
-                <a:solidFill>
-                  <a:srgbClr val="22282E"/>
-                </a:solidFill>
-              </a:rPr>
-              <a:t>•  Compara la información que aporta Zeek frente a una alerta de Suricata para el mismo tráfico.</a:t>
+              <a:t>•  Zeek 6.x: instalación desde paquetes oficiales o apt install zeek (repos de OpenSUSE OBS) / compilación.</a:t>
+            </a:r>
+          </a:p>
+          <a:p>
+            <a:pPr>
+              <a:spcAft>
+                <a:spcPts val="600"/>
+              </a:spcAft>
+            </a:pPr>
+            <a:r>
+              <a:rPr sz="1500">
+                <a:solidFill>
+                  <a:srgbClr val="22282E"/>
+                </a:solidFill>
+              </a:rPr>
+              <a:t>•  zeek-cut viene con Zeek; jq si usas la salida JSON.</a:t>
+            </a:r>
+          </a:p>
+          <a:p>
+            <a:pPr>
+              <a:spcAft>
+                <a:spcPts val="600"/>
+              </a:spcAft>
+            </a:pPr>
+            <a:r>
+              <a:rPr sz="1500">
+                <a:solidFill>
+                  <a:srgbClr val="22282E"/>
+                </a:solidFill>
+              </a:rPr>
+              <a:t>•  Un pcap de laboratorio con varios protocolos (reutiliza los de clases anteriores).</a:t>
             </a:r>
           </a:p>
         </p:txBody>
@@ -4733,7 +5094,7 @@
                   <a:srgbClr val="0B3D2E"/>
                 </a:solidFill>
               </a:rPr>
-              <a:t>📝 Reto verificable</a:t>
+              <a:t>🧪 Laboratorio guiado</a:t>
             </a:r>
           </a:p>
         </p:txBody>
@@ -4771,22 +5132,97 @@
                   <a:srgbClr val="22282E"/>
                 </a:solidFill>
               </a:rPr>
-              <a:t>•  Procesa con Zeek una captura de tu laboratorio que incluya actividad web y DNS, y entrega: (a) un resumen de las conexiones top por bytes con zeek-cut, (b) al menos un archivo extraído del tráfico con su hash, y (c) un script .zeek propio que genere un notice para una condición de detección que definas (user-agent, volumen o dominio). Incluye la salida de notice.log.</a:t>
-            </a:r>
-          </a:p>
-          <a:p>
-            <a:pPr>
-              <a:spcAft>
-                <a:spcPts val="600"/>
-              </a:spcAft>
-            </a:pPr>
-            <a:r>
-              <a:rPr sz="1500">
-                <a:solidFill>
-                  <a:srgbClr val="22282E"/>
-                </a:solidFill>
-              </a:rPr>
-              <a:t>•  Criterio de aceptación: los logs se generan correctamente, el archivo extraído coincide (hash) con el transferido, y tu script produce el notice esperado al procesar la captura, sin falsos positivos sobre el tráfico legítimo.</a:t>
+              <a:t>•  Procesa un pcap y genera los logs:</a:t>
+            </a:r>
+          </a:p>
+          <a:p>
+            <a:pPr>
+              <a:spcAft>
+                <a:spcPts val="600"/>
+              </a:spcAft>
+            </a:pPr>
+            <a:r>
+              <a:rPr sz="1500">
+                <a:solidFill>
+                  <a:srgbClr val="22282E"/>
+                </a:solidFill>
+              </a:rPr>
+              <a:t>•  Inspecciona conexiones con zeek-cut:</a:t>
+            </a:r>
+          </a:p>
+          <a:p>
+            <a:pPr>
+              <a:spcAft>
+                <a:spcPts val="600"/>
+              </a:spcAft>
+            </a:pPr>
+            <a:r>
+              <a:rPr sz="1500">
+                <a:solidFill>
+                  <a:srgbClr val="22282E"/>
+                </a:solidFill>
+              </a:rPr>
+              <a:t>•  Analiza DNS:</a:t>
+            </a:r>
+          </a:p>
+          <a:p>
+            <a:pPr>
+              <a:spcAft>
+                <a:spcPts val="600"/>
+              </a:spcAft>
+            </a:pPr>
+            <a:r>
+              <a:rPr sz="1500">
+                <a:solidFill>
+                  <a:srgbClr val="22282E"/>
+                </a:solidFill>
+              </a:rPr>
+              <a:t>•  Analiza HTTP (hosts y URIs solicitados):</a:t>
+            </a:r>
+          </a:p>
+          <a:p>
+            <a:pPr>
+              <a:spcAft>
+                <a:spcPts val="600"/>
+              </a:spcAft>
+            </a:pPr>
+            <a:r>
+              <a:rPr sz="1500">
+                <a:solidFill>
+                  <a:srgbClr val="22282E"/>
+                </a:solidFill>
+              </a:rPr>
+              <a:t>•  Extrae archivos del tráfico con el script incorporado:</a:t>
+            </a:r>
+          </a:p>
+          <a:p>
+            <a:pPr>
+              <a:spcAft>
+                <a:spcPts val="600"/>
+              </a:spcAft>
+            </a:pPr>
+            <a:r>
+              <a:rPr sz="1500">
+                <a:solidFill>
+                  <a:srgbClr val="22282E"/>
+                </a:solidFill>
+              </a:rPr>
+              <a:t>•  Escribe un script de detección deteccion.zeek que emita un notice ante user-agents sospechosos:</a:t>
+            </a:r>
+          </a:p>
+          <a:p>
+            <a:pPr>
+              <a:spcAft>
+                <a:spcPts val="600"/>
+              </a:spcAft>
+            </a:pPr>
+            <a:r>
+              <a:rPr sz="1500">
+                <a:solidFill>
+                  <a:srgbClr val="22282E"/>
+                </a:solidFill>
+              </a:rPr>
+              <a:t>•  Ejecútalo:</a:t>
             </a:r>
           </a:p>
         </p:txBody>
